--- a/Quadro_Aulas_Report_Auto.pptx
+++ b/Quadro_Aulas_Report_Auto.pptx
@@ -1038,7 +1038,7 @@
                   <a:srgbClr val="8FA3C0"/>
                 </a:solidFill>
               </a:rPr>
-              <a:t>30 de Maio de 2026 as 20:31</a:t>
+              <a:t>30 de Maio de 2026 as 20:36</a:t>
             </a:r>
             <a:endParaRPr lang="en-US" sz="700" dirty="0"/>
           </a:p>

--- a/Quadro_Aulas_Report_Auto.pptx
+++ b/Quadro_Aulas_Report_Auto.pptx
@@ -1038,7 +1038,7 @@
                   <a:srgbClr val="8FA3C0"/>
                 </a:solidFill>
               </a:rPr>
-              <a:t>30 de Maio de 2026 as 20:36</a:t>
+              <a:t>30 de Maio de 2026 as 20:37</a:t>
             </a:r>
             <a:endParaRPr lang="en-US" sz="700" dirty="0"/>
           </a:p>

--- a/Quadro_Aulas_Report_Auto.pptx
+++ b/Quadro_Aulas_Report_Auto.pptx
@@ -1038,7 +1038,7 @@
                   <a:srgbClr val="8FA3C0"/>
                 </a:solidFill>
               </a:rPr>
-              <a:t>30 de Maio de 2026 as 20:37</a:t>
+              <a:t>30 de Maio de 2026 as 20:38</a:t>
             </a:r>
             <a:endParaRPr lang="en-US" sz="700" dirty="0"/>
           </a:p>

--- a/Quadro_Aulas_Report_Auto.pptx
+++ b/Quadro_Aulas_Report_Auto.pptx
@@ -1038,7 +1038,7 @@
                   <a:srgbClr val="8FA3C0"/>
                 </a:solidFill>
               </a:rPr>
-              <a:t>30 de Maio de 2026 as 20:38</a:t>
+              <a:t>30 de Maio de 2026 as 20:39</a:t>
             </a:r>
             <a:endParaRPr lang="en-US" sz="700" dirty="0"/>
           </a:p>

--- a/Quadro_Aulas_Report_Auto.pptx
+++ b/Quadro_Aulas_Report_Auto.pptx
@@ -1038,7 +1038,7 @@
                   <a:srgbClr val="8FA3C0"/>
                 </a:solidFill>
               </a:rPr>
-              <a:t>30 de Maio de 2026 as 20:39</a:t>
+              <a:t>30 de Maio de 2026 as 20:40</a:t>
             </a:r>
             <a:endParaRPr lang="en-US" sz="700" dirty="0"/>
           </a:p>

--- a/Quadro_Aulas_Report_Auto.pptx
+++ b/Quadro_Aulas_Report_Auto.pptx
@@ -1038,7 +1038,7 @@
                   <a:srgbClr val="8FA3C0"/>
                 </a:solidFill>
               </a:rPr>
-              <a:t>30 de Maio de 2026 as 20:40</a:t>
+              <a:t>30 de Maio de 2026 as 20:55</a:t>
             </a:r>
             <a:endParaRPr lang="en-US" sz="700" dirty="0"/>
           </a:p>

--- a/Quadro_Aulas_Report_Auto.pptx
+++ b/Quadro_Aulas_Report_Auto.pptx
@@ -1038,7 +1038,7 @@
                   <a:srgbClr val="8FA3C0"/>
                 </a:solidFill>
               </a:rPr>
-              <a:t>30 de Maio de 2026 as 20:55</a:t>
+              <a:t>30 de Maio de 2026 as 21:25</a:t>
             </a:r>
             <a:endParaRPr lang="en-US" sz="700" dirty="0"/>
           </a:p>

--- a/Quadro_Aulas_Report_Auto.pptx
+++ b/Quadro_Aulas_Report_Auto.pptx
@@ -1038,7 +1038,7 @@
                   <a:srgbClr val="8FA3C0"/>
                 </a:solidFill>
               </a:rPr>
-              <a:t>30 de Maio de 2026 as 21:25</a:t>
+              <a:t>30 de Maio de 2026 as 21:46</a:t>
             </a:r>
             <a:endParaRPr lang="en-US" sz="700" dirty="0"/>
           </a:p>

--- a/Quadro_Aulas_Report_Auto.pptx
+++ b/Quadro_Aulas_Report_Auto.pptx
@@ -1038,7 +1038,7 @@
                   <a:srgbClr val="8FA3C0"/>
                 </a:solidFill>
               </a:rPr>
-              <a:t>30 de Maio de 2026 as 21:46</a:t>
+              <a:t>30 de Maio de 2026 as 21:59</a:t>
             </a:r>
             <a:endParaRPr lang="en-US" sz="700" dirty="0"/>
           </a:p>

--- a/Quadro_Aulas_Report_Auto.pptx
+++ b/Quadro_Aulas_Report_Auto.pptx
@@ -1038,7 +1038,7 @@
                   <a:srgbClr val="8FA3C0"/>
                 </a:solidFill>
               </a:rPr>
-              <a:t>30 de Maio de 2026 as 21:59</a:t>
+              <a:t>30 de Maio de 2026 as 22:20</a:t>
             </a:r>
             <a:endParaRPr lang="en-US" sz="700" dirty="0"/>
           </a:p>

--- a/Quadro_Aulas_Report_Auto.pptx
+++ b/Quadro_Aulas_Report_Auto.pptx
@@ -1038,7 +1038,7 @@
                   <a:srgbClr val="8FA3C0"/>
                 </a:solidFill>
               </a:rPr>
-              <a:t>30 de Maio de 2026 as 22:20</a:t>
+              <a:t>30 de Maio de 2026 as 22:26</a:t>
             </a:r>
             <a:endParaRPr lang="en-US" sz="700" dirty="0"/>
           </a:p>

--- a/Quadro_Aulas_Report_Auto.pptx
+++ b/Quadro_Aulas_Report_Auto.pptx
@@ -1038,7 +1038,7 @@
                   <a:srgbClr val="8FA3C0"/>
                 </a:solidFill>
               </a:rPr>
-              <a:t>30 de Maio de 2026 as 22:26</a:t>
+              <a:t>30 de Maio de 2026 as 23:22</a:t>
             </a:r>
             <a:endParaRPr lang="en-US" sz="700" dirty="0"/>
           </a:p>

--- a/Quadro_Aulas_Report_Auto.pptx
+++ b/Quadro_Aulas_Report_Auto.pptx
@@ -1038,7 +1038,7 @@
                   <a:srgbClr val="8FA3C0"/>
                 </a:solidFill>
               </a:rPr>
-              <a:t>30 de Maio de 2026 as 23:22</a:t>
+              <a:t>30 de Maio de 2026 as 23:27</a:t>
             </a:r>
             <a:endParaRPr lang="en-US" sz="700" dirty="0"/>
           </a:p>

--- a/Quadro_Aulas_Report_Auto.pptx
+++ b/Quadro_Aulas_Report_Auto.pptx
@@ -1038,7 +1038,7 @@
                   <a:srgbClr val="8FA3C0"/>
                 </a:solidFill>
               </a:rPr>
-              <a:t>30 de Maio de 2026 as 23:27</a:t>
+              <a:t>30 de Maio de 2026 as 23:34</a:t>
             </a:r>
             <a:endParaRPr lang="en-US" sz="700" dirty="0"/>
           </a:p>

--- a/Quadro_Aulas_Report_Auto.pptx
+++ b/Quadro_Aulas_Report_Auto.pptx
@@ -1038,7 +1038,7 @@
                   <a:srgbClr val="8FA3C0"/>
                 </a:solidFill>
               </a:rPr>
-              <a:t>30 de Maio de 2026 as 23:34</a:t>
+              <a:t>1 de Junho de 2026 as 09:24</a:t>
             </a:r>
             <a:endParaRPr lang="en-US" sz="700" dirty="0"/>
           </a:p>
@@ -1135,7 +1135,7 @@
                   <a:srgbClr val="FFFFFF"/>
                 </a:solidFill>
               </a:rPr>
-              <a:t>344</a:t>
+              <a:t>343</a:t>
             </a:r>
             <a:endParaRPr lang="en-US" sz="2400" dirty="0"/>
           </a:p>
@@ -1351,7 +1351,7 @@
                   <a:srgbClr val="F87171"/>
                 </a:solidFill>
               </a:rPr>
-              <a:t>100</a:t>
+              <a:t>99</a:t>
             </a:r>
             <a:endParaRPr lang="en-US" sz="2400" dirty="0"/>
           </a:p>
@@ -1473,7 +1473,7 @@
                   <a:srgbClr val="8FA3C0"/>
                 </a:solidFill>
               </a:rPr>
-              <a:t>63% concluido  .  216 de 344 itens</a:t>
+              <a:t>63% concluido  .  216 de 343 itens</a:t>
             </a:r>
             <a:endParaRPr lang="en-US" sz="700" dirty="0"/>
           </a:p>
@@ -2227,7 +2227,7 @@
                   <a:srgbClr val="222222"/>
                 </a:solidFill>
               </a:rPr>
-              <a:t>8 Stories · 3 NFT · 78 itens</a:t>
+              <a:t>8 Stories · 3 NFT · 96 itens</a:t>
             </a:r>
             <a:endParaRPr lang="en-US" sz="750" dirty="0"/>
           </a:p>
@@ -2263,7 +2263,7 @@
                   <a:srgbClr val="222222"/>
                 </a:solidFill>
               </a:rPr>
-              <a:t>A Fazer: 9 . Em progresso: 1 . Finalizados: 68</a:t>
+              <a:t>A Fazer: 25 . Em progresso: 1 . Finalizados: 70</a:t>
             </a:r>
             <a:endParaRPr lang="en-US" sz="750" dirty="0"/>
           </a:p>
@@ -2299,7 +2299,7 @@
                   <a:srgbClr val="222222"/>
                 </a:solidFill>
               </a:rPr>
-              <a:t>Est: 348.5h . Real: 407.4h . Rem: 17.5h</a:t>
+              <a:t>Est: 398h . Real: 408.7h . Rem: 65h</a:t>
             </a:r>
             <a:endParaRPr lang="en-US" sz="750" dirty="0"/>
           </a:p>
@@ -2425,7 +2425,7 @@
         <p:spPr>
           <a:xfrm>
             <a:off x="4946904" y="1033272"/>
-            <a:ext cx="1917222" cy="50292"/>
+            <a:ext cx="1608704" cy="50292"/>
           </a:xfrm>
           <a:prstGeom prst="rect">
             <a:avLst/>
@@ -2471,7 +2471,7 @@
                   <a:srgbClr val="888888"/>
                 </a:solidFill>
               </a:rPr>
-              <a:t>Subs: 87% · 68 de 78</a:t>
+              <a:t>Subs: 73% · 70 de 96</a:t>
             </a:r>
             <a:endParaRPr lang="en-US" sz="650" dirty="0"/>
           </a:p>
@@ -2507,7 +2507,7 @@
                   <a:srgbClr val="D97706"/>
                 </a:solidFill>
               </a:rPr>
-              <a:t>Projetado: 424.9h (+76.4h / +22%)</a:t>
+              <a:t>Projetado: 473.7h (+75.7h / +19%)</a:t>
             </a:r>
             <a:endParaRPr lang="en-US" sz="800" dirty="0"/>
           </a:p>
@@ -3537,7 +3537,7 @@
                   <a:srgbClr val="222222"/>
                 </a:solidFill>
               </a:rPr>
-              <a:t>1165.5h</a:t>
+              <a:t>1165h</a:t>
             </a:r>
             <a:endParaRPr lang="en-US" sz="2400" dirty="0"/>
           </a:p>
@@ -3803,7 +3803,7 @@
                   <a:srgbClr val="F87171"/>
                 </a:solidFill>
               </a:rPr>
-              <a:t>414.5h</a:t>
+              <a:t>414h</a:t>
             </a:r>
             <a:endParaRPr lang="en-US" sz="2400" dirty="0"/>
           </a:p>
@@ -3972,7 +3972,7 @@
                   <a:srgbClr val="888888"/>
                 </a:solidFill>
               </a:rPr>
-              <a:t>projetado: 1357.8h (+16%)</a:t>
+              <a:t>projetado: 1357.3h (+17%)</a:t>
             </a:r>
             <a:endParaRPr lang="en-US" sz="700" dirty="0"/>
           </a:p>
@@ -3987,7 +3987,7 @@
         <p:spPr>
           <a:xfrm>
             <a:off x="2441448" y="2916936"/>
-            <a:ext cx="6701974" cy="54864"/>
+            <a:ext cx="6704442" cy="54864"/>
           </a:xfrm>
           <a:prstGeom prst="rect">
             <a:avLst/>
@@ -4011,8 +4011,8 @@
         </p:nvSpPr>
         <p:spPr>
           <a:xfrm>
-            <a:off x="9143422" y="2916936"/>
-            <a:ext cx="2944946" cy="54864"/>
+            <a:off x="9145890" y="2916936"/>
+            <a:ext cx="2942478" cy="54864"/>
           </a:xfrm>
           <a:prstGeom prst="rect">
             <a:avLst/>
@@ -4153,7 +4153,7 @@
                   <a:srgbClr val="0F6E56"/>
                 </a:solidFill>
               </a:rPr>
-              <a:t>93% concluido</a:t>
+              <a:t>84% concluido</a:t>
             </a:r>
             <a:endParaRPr lang="en-US" sz="650" dirty="0"/>
           </a:p>
@@ -4193,7 +4193,7 @@
         <p:spPr>
           <a:xfrm>
             <a:off x="2551176" y="3291840"/>
-            <a:ext cx="4239204" cy="64008"/>
+            <a:ext cx="3828959" cy="64008"/>
           </a:xfrm>
           <a:prstGeom prst="rect">
             <a:avLst/>
@@ -4300,7 +4300,7 @@
                   <a:srgbClr val="1D9E75"/>
                 </a:solidFill>
               </a:rPr>
-              <a:t>03/06/2026</a:t>
+              <a:t>04/06/2026</a:t>
             </a:r>
             <a:endParaRPr lang="en-US" sz="1050" dirty="0"/>
           </a:p>
@@ -4772,7 +4772,7 @@
                   <a:srgbClr val="1D9E75"/>
                 </a:solidFill>
               </a:rPr>
-              <a:t>25/06/2026</a:t>
+              <a:t>26/06/2026</a:t>
             </a:r>
             <a:endParaRPr lang="en-US" sz="1050" dirty="0"/>
           </a:p>
@@ -5838,7 +5838,7 @@
                   <a:srgbClr val="222222"/>
                 </a:solidFill>
               </a:rPr>
-              <a:t>Observabilidade: Projetado 25/06/2026 · Base 29/05/2026</a:t>
+              <a:t>Observabilidade: Projetado 26/06/2026 · Base 29/05/2026</a:t>
             </a:r>
             <a:endParaRPr lang="en-US" sz="750" dirty="0"/>
           </a:p>
@@ -6210,7 +6210,7 @@
                   <a:srgbClr val="FFFFFF"/>
                 </a:solidFill>
               </a:rPr>
-              <a:t>81</a:t>
+              <a:t>80</a:t>
             </a:r>
             <a:endParaRPr lang="en-US" sz="650" dirty="0"/>
           </a:p>
@@ -6260,7 +6260,7 @@
                   <a:srgbClr val="222222"/>
                 </a:solidFill>
               </a:rPr>
-              <a:t>81 itens criados pos 01/05</a:t>
+              <a:t>80 itens criados pos 01/05</a:t>
             </a:r>
             <a:endParaRPr lang="en-US" sz="750" dirty="0"/>
           </a:p>
@@ -6296,7 +6296,7 @@
                   <a:srgbClr val="222222"/>
                 </a:solidFill>
               </a:rPr>
-              <a:t>Princ +18h · Redund +84h · Obs +7h</a:t>
+              <a:t>Princ +18h · Redund +133h · Obs +7h</a:t>
             </a:r>
             <a:endParaRPr lang="en-US" sz="750" dirty="0"/>
           </a:p>

--- a/Quadro_Aulas_Report_Auto.pptx
+++ b/Quadro_Aulas_Report_Auto.pptx
@@ -1038,7 +1038,7 @@
                   <a:srgbClr val="8FA3C0"/>
                 </a:solidFill>
               </a:rPr>
-              <a:t>1 de Junho de 2026 as 09:24</a:t>
+              <a:t>1 de Junho de 2026 as 12:20</a:t>
             </a:r>
             <a:endParaRPr lang="en-US" sz="700" dirty="0"/>
           </a:p>
@@ -1207,7 +1207,7 @@
                   <a:srgbClr val="4ADE80"/>
                 </a:solidFill>
               </a:rPr>
-              <a:t>216</a:t>
+              <a:t>217</a:t>
             </a:r>
             <a:endParaRPr lang="en-US" sz="2400" dirty="0"/>
           </a:p>
@@ -1279,7 +1279,7 @@
                   <a:srgbClr val="FCD34D"/>
                 </a:solidFill>
               </a:rPr>
-              <a:t>24</a:t>
+              <a:t>23</a:t>
             </a:r>
             <a:endParaRPr lang="en-US" sz="2400" dirty="0"/>
           </a:p>
@@ -1473,7 +1473,7 @@
                   <a:srgbClr val="8FA3C0"/>
                 </a:solidFill>
               </a:rPr>
-              <a:t>63% concluido  .  216 de 343 itens</a:t>
+              <a:t>63% concluido  .  217 de 343 itens</a:t>
             </a:r>
             <a:endParaRPr lang="en-US" sz="700" dirty="0"/>
           </a:p>
@@ -6798,7 +6798,7 @@
                   <a:srgbClr val="888888"/>
                 </a:solidFill>
               </a:rPr>
-              <a:t>139.5h estimadas</a:t>
+              <a:t>147.5h estimadas</a:t>
             </a:r>
             <a:endParaRPr lang="en-US" sz="850" dirty="0"/>
           </a:p>

--- a/Quadro_Aulas_Report_Auto.pptx
+++ b/Quadro_Aulas_Report_Auto.pptx
@@ -1038,7 +1038,7 @@
                   <a:srgbClr val="8FA3C0"/>
                 </a:solidFill>
               </a:rPr>
-              <a:t>1 de Junho de 2026 as 12:20</a:t>
+              <a:t>1 de Junho de 2026 as 18:38</a:t>
             </a:r>
             <a:endParaRPr lang="en-US" sz="700" dirty="0"/>
           </a:p>
@@ -1135,7 +1135,7 @@
                   <a:srgbClr val="FFFFFF"/>
                 </a:solidFill>
               </a:rPr>
-              <a:t>343</a:t>
+              <a:t>345</a:t>
             </a:r>
             <a:endParaRPr lang="en-US" sz="2400" dirty="0"/>
           </a:p>
@@ -1207,7 +1207,7 @@
                   <a:srgbClr val="4ADE80"/>
                 </a:solidFill>
               </a:rPr>
-              <a:t>217</a:t>
+              <a:t>229</a:t>
             </a:r>
             <a:endParaRPr lang="en-US" sz="2400" dirty="0"/>
           </a:p>
@@ -1279,7 +1279,7 @@
                   <a:srgbClr val="FCD34D"/>
                 </a:solidFill>
               </a:rPr>
-              <a:t>23</a:t>
+              <a:t>14</a:t>
             </a:r>
             <a:endParaRPr lang="en-US" sz="2400" dirty="0"/>
           </a:p>
@@ -1351,7 +1351,7 @@
                   <a:srgbClr val="F87171"/>
                 </a:solidFill>
               </a:rPr>
-              <a:t>99</a:t>
+              <a:t>92</a:t>
             </a:r>
             <a:endParaRPr lang="en-US" sz="2400" dirty="0"/>
           </a:p>
@@ -1427,7 +1427,7 @@
         <p:spPr>
           <a:xfrm>
             <a:off x="137160" y="3538728"/>
-            <a:ext cx="1296162" cy="91440"/>
+            <a:ext cx="1357884" cy="91440"/>
           </a:xfrm>
           <a:prstGeom prst="rect">
             <a:avLst/>
@@ -1473,7 +1473,7 @@
                   <a:srgbClr val="8FA3C0"/>
                 </a:solidFill>
               </a:rPr>
-              <a:t>63% concluido  .  217 de 343 itens</a:t>
+              <a:t>66% concluido  .  229 de 345 itens</a:t>
             </a:r>
             <a:endParaRPr lang="en-US" sz="700" dirty="0"/>
           </a:p>
@@ -2263,7 +2263,7 @@
                   <a:srgbClr val="222222"/>
                 </a:solidFill>
               </a:rPr>
-              <a:t>A Fazer: 25 . Em progresso: 1 . Finalizados: 70</a:t>
+              <a:t>A Fazer: 24 . Em progresso: 2 . Finalizados: 70</a:t>
             </a:r>
             <a:endParaRPr lang="en-US" sz="750" dirty="0"/>
           </a:p>
@@ -2299,7 +2299,7 @@
                   <a:srgbClr val="222222"/>
                 </a:solidFill>
               </a:rPr>
-              <a:t>Est: 398h . Real: 408.7h . Rem: 65h</a:t>
+              <a:t>Est: 398h . Real: 415.7h . Rem: 58h</a:t>
             </a:r>
             <a:endParaRPr lang="en-US" sz="750" dirty="0"/>
           </a:p>
@@ -3153,7 +3153,7 @@
                   <a:srgbClr val="222222"/>
                 </a:solidFill>
               </a:rPr>
-              <a:t>A Fazer: 71 . Em progresso: 5 . Finalizados: 30</a:t>
+              <a:t>A Fazer: 63 . Em progresso: 1 . Finalizados: 42</a:t>
             </a:r>
             <a:endParaRPr lang="en-US" sz="750" dirty="0"/>
           </a:p>
@@ -3189,7 +3189,7 @@
                   <a:srgbClr val="222222"/>
                 </a:solidFill>
               </a:rPr>
-              <a:t>Est: 486.5h . Real: 131h . Rem: 349h</a:t>
+              <a:t>Est: 486.5h . Real: 188h . Rem: 282.5h</a:t>
             </a:r>
             <a:endParaRPr lang="en-US" sz="750" dirty="0"/>
           </a:p>
@@ -3315,7 +3315,7 @@
         <p:spPr>
           <a:xfrm>
             <a:off x="9811512" y="1033272"/>
-            <a:ext cx="617037" cy="50292"/>
+            <a:ext cx="881482" cy="50292"/>
           </a:xfrm>
           <a:prstGeom prst="rect">
             <a:avLst/>
@@ -3361,7 +3361,7 @@
                   <a:srgbClr val="888888"/>
                 </a:solidFill>
               </a:rPr>
-              <a:t>Subs: 28% · 30 de 106</a:t>
+              <a:t>Subs: 40% · 42 de 106</a:t>
             </a:r>
             <a:endParaRPr lang="en-US" sz="650" dirty="0"/>
           </a:p>
@@ -3397,7 +3397,7 @@
                   <a:srgbClr val="1D9E75"/>
                 </a:solidFill>
               </a:rPr>
-              <a:t>Projetado: 480h (-6.5h / -1%)</a:t>
+              <a:t>Projetado: 470.5h (-16.0h / -3%)</a:t>
             </a:r>
             <a:endParaRPr lang="en-US" sz="800" dirty="0"/>
           </a:p>
@@ -3670,7 +3670,7 @@
                   <a:srgbClr val="D97706"/>
                 </a:solidFill>
               </a:rPr>
-              <a:t>943.3h</a:t>
+              <a:t>1007.3h</a:t>
             </a:r>
             <a:endParaRPr lang="en-US" sz="2400" dirty="0"/>
           </a:p>
@@ -3803,7 +3803,7 @@
                   <a:srgbClr val="F87171"/>
                 </a:solidFill>
               </a:rPr>
-              <a:t>414h</a:t>
+              <a:t>340.5h</a:t>
             </a:r>
             <a:endParaRPr lang="en-US" sz="2400" dirty="0"/>
           </a:p>
@@ -3936,7 +3936,7 @@
                   <a:srgbClr val="D97706"/>
                 </a:solidFill>
               </a:rPr>
-              <a:t>+192.3h</a:t>
+              <a:t>+182.8h</a:t>
             </a:r>
             <a:endParaRPr lang="en-US" sz="2400" dirty="0"/>
           </a:p>
@@ -3972,7 +3972,7 @@
                   <a:srgbClr val="888888"/>
                 </a:solidFill>
               </a:rPr>
-              <a:t>projetado: 1357.3h (+17%)</a:t>
+              <a:t>projetado: 1347.8h (+16%)</a:t>
             </a:r>
             <a:endParaRPr lang="en-US" sz="700" dirty="0"/>
           </a:p>
@@ -3987,7 +3987,7 @@
         <p:spPr>
           <a:xfrm>
             <a:off x="2441448" y="2916936"/>
-            <a:ext cx="6704442" cy="54864"/>
+            <a:ext cx="7209781" cy="54864"/>
           </a:xfrm>
           <a:prstGeom prst="rect">
             <a:avLst/>
@@ -4011,8 +4011,8 @@
         </p:nvSpPr>
         <p:spPr>
           <a:xfrm>
-            <a:off x="9145890" y="2916936"/>
-            <a:ext cx="2942478" cy="54864"/>
+            <a:off x="9651229" y="2916936"/>
+            <a:ext cx="2437139" cy="54864"/>
           </a:xfrm>
           <a:prstGeom prst="rect">
             <a:avLst/>
@@ -4625,7 +4625,7 @@
                   <a:srgbClr val="991B1B"/>
                 </a:solidFill>
               </a:rPr>
-              <a:t>28% concluido</a:t>
+              <a:t>40% concluido</a:t>
             </a:r>
             <a:endParaRPr lang="en-US" sz="650" dirty="0"/>
           </a:p>
@@ -4665,7 +4665,7 @@
         <p:spPr>
           <a:xfrm>
             <a:off x="7420356" y="3291840"/>
-            <a:ext cx="1276320" cy="64008"/>
+            <a:ext cx="1823314" cy="64008"/>
           </a:xfrm>
           <a:prstGeom prst="rect">
             <a:avLst/>
@@ -4772,7 +4772,7 @@
                   <a:srgbClr val="1D9E75"/>
                 </a:solidFill>
               </a:rPr>
-              <a:t>26/06/2026</a:t>
+              <a:t>22/06/2026</a:t>
             </a:r>
             <a:endParaRPr lang="en-US" sz="1050" dirty="0"/>
           </a:p>
@@ -5070,7 +5070,7 @@
                   <a:srgbClr val="D85A30"/>
                 </a:solidFill>
               </a:rPr>
-              <a:t>22.4%</a:t>
+              <a:t>21.3%</a:t>
             </a:r>
             <a:endParaRPr lang="en-US" sz="2200" dirty="0"/>
           </a:p>
@@ -5203,7 +5203,7 @@
                   <a:srgbClr val="534AB7"/>
                 </a:solidFill>
               </a:rPr>
-              <a:t>9.2%</a:t>
+              <a:t>8.8%</a:t>
             </a:r>
             <a:endParaRPr lang="en-US" sz="2200" dirty="0"/>
           </a:p>
@@ -5336,7 +5336,7 @@
                   <a:srgbClr val="1D9E75"/>
                 </a:solidFill>
               </a:rPr>
-              <a:t>77.6%</a:t>
+              <a:t>78.8%</a:t>
             </a:r>
             <a:endParaRPr lang="en-US" sz="2200" dirty="0"/>
           </a:p>
@@ -5838,7 +5838,7 @@
                   <a:srgbClr val="222222"/>
                 </a:solidFill>
               </a:rPr>
-              <a:t>Observabilidade: Projetado 26/06/2026 · Base 29/05/2026</a:t>
+              <a:t>Observabilidade: Projetado 22/06/2026 · Base 29/05/2026</a:t>
             </a:r>
             <a:endParaRPr lang="en-US" sz="750" dirty="0"/>
           </a:p>
@@ -6210,7 +6210,7 @@
                   <a:srgbClr val="FFFFFF"/>
                 </a:solidFill>
               </a:rPr>
-              <a:t>80</a:t>
+              <a:t>82</a:t>
             </a:r>
             <a:endParaRPr lang="en-US" sz="650" dirty="0"/>
           </a:p>
@@ -6260,7 +6260,7 @@
                   <a:srgbClr val="222222"/>
                 </a:solidFill>
               </a:rPr>
-              <a:t>80 itens criados pos 01/05</a:t>
+              <a:t>82 itens criados pos 01/05</a:t>
             </a:r>
             <a:endParaRPr lang="en-US" sz="750" dirty="0"/>
           </a:p>
@@ -6762,7 +6762,7 @@
                   <a:srgbClr val="D85A30"/>
                 </a:solidFill>
               </a:rPr>
-              <a:t>264.5h · 43 subs finalizadas</a:t>
+              <a:t>266.5h · 43 subs finalizadas</a:t>
             </a:r>
             <a:endParaRPr lang="en-US" sz="950" dirty="0"/>
           </a:p>
@@ -7332,7 +7332,7 @@
                   <a:srgbClr val="D97706"/>
                 </a:solidFill>
               </a:rPr>
-              <a:t>94h · 8 subs finalizadas</a:t>
+              <a:t>164h · 20 subs finalizadas</a:t>
             </a:r>
             <a:endParaRPr lang="en-US" sz="950" dirty="0"/>
           </a:p>
@@ -7368,7 +7368,7 @@
                   <a:srgbClr val="888888"/>
                 </a:solidFill>
               </a:rPr>
-              <a:t>82h estimadas</a:t>
+              <a:t>162h estimadas</a:t>
             </a:r>
             <a:endParaRPr lang="en-US" sz="850" dirty="0"/>
           </a:p>

--- a/Quadro_Aulas_Report_Auto.pptx
+++ b/Quadro_Aulas_Report_Auto.pptx
@@ -1038,7 +1038,7 @@
                   <a:srgbClr val="8FA3C0"/>
                 </a:solidFill>
               </a:rPr>
-              <a:t>1 de Junho de 2026 as 18:38</a:t>
+              <a:t>1 de Junho de 2026 as 19:13</a:t>
             </a:r>
             <a:endParaRPr lang="en-US" sz="700" dirty="0"/>
           </a:p>
@@ -1207,7 +1207,7 @@
                   <a:srgbClr val="4ADE80"/>
                 </a:solidFill>
               </a:rPr>
-              <a:t>229</a:t>
+              <a:t>230</a:t>
             </a:r>
             <a:endParaRPr lang="en-US" sz="2400" dirty="0"/>
           </a:p>
@@ -1351,7 +1351,7 @@
                   <a:srgbClr val="F87171"/>
                 </a:solidFill>
               </a:rPr>
-              <a:t>92</a:t>
+              <a:t>91</a:t>
             </a:r>
             <a:endParaRPr lang="en-US" sz="2400" dirty="0"/>
           </a:p>
@@ -1427,7 +1427,7 @@
         <p:spPr>
           <a:xfrm>
             <a:off x="137160" y="3538728"/>
-            <a:ext cx="1357884" cy="91440"/>
+            <a:ext cx="1378458" cy="91440"/>
           </a:xfrm>
           <a:prstGeom prst="rect">
             <a:avLst/>
@@ -1473,7 +1473,7 @@
                   <a:srgbClr val="8FA3C0"/>
                 </a:solidFill>
               </a:rPr>
-              <a:t>66% concluido  .  229 de 345 itens</a:t>
+              <a:t>67% concluido  .  230 de 345 itens</a:t>
             </a:r>
             <a:endParaRPr lang="en-US" sz="700" dirty="0"/>
           </a:p>
@@ -2263,7 +2263,7 @@
                   <a:srgbClr val="222222"/>
                 </a:solidFill>
               </a:rPr>
-              <a:t>A Fazer: 24 . Em progresso: 2 . Finalizados: 70</a:t>
+              <a:t>A Fazer: 23 . Em progresso: 2 . Finalizados: 71</a:t>
             </a:r>
             <a:endParaRPr lang="en-US" sz="750" dirty="0"/>
           </a:p>
@@ -2299,7 +2299,7 @@
                   <a:srgbClr val="222222"/>
                 </a:solidFill>
               </a:rPr>
-              <a:t>Est: 398h . Real: 415.7h . Rem: 58h</a:t>
+              <a:t>Est: 398h . Real: 418.7h . Rem: 54h</a:t>
             </a:r>
             <a:endParaRPr lang="en-US" sz="750" dirty="0"/>
           </a:p>
@@ -2425,7 +2425,7 @@
         <p:spPr>
           <a:xfrm>
             <a:off x="4946904" y="1033272"/>
-            <a:ext cx="1608704" cy="50292"/>
+            <a:ext cx="1630741" cy="50292"/>
           </a:xfrm>
           <a:prstGeom prst="rect">
             <a:avLst/>
@@ -2471,7 +2471,7 @@
                   <a:srgbClr val="888888"/>
                 </a:solidFill>
               </a:rPr>
-              <a:t>Subs: 73% · 70 de 96</a:t>
+              <a:t>Subs: 74% · 71 de 96</a:t>
             </a:r>
             <a:endParaRPr lang="en-US" sz="650" dirty="0"/>
           </a:p>
@@ -2507,7 +2507,7 @@
                   <a:srgbClr val="D97706"/>
                 </a:solidFill>
               </a:rPr>
-              <a:t>Projetado: 473.7h (+75.7h / +19%)</a:t>
+              <a:t>Projetado: 472.7h (+74.7h / +19%)</a:t>
             </a:r>
             <a:endParaRPr lang="en-US" sz="800" dirty="0"/>
           </a:p>
@@ -3670,7 +3670,7 @@
                   <a:srgbClr val="D97706"/>
                 </a:solidFill>
               </a:rPr>
-              <a:t>1007.3h</a:t>
+              <a:t>1010.3h</a:t>
             </a:r>
             <a:endParaRPr lang="en-US" sz="2400" dirty="0"/>
           </a:p>
@@ -3803,7 +3803,7 @@
                   <a:srgbClr val="F87171"/>
                 </a:solidFill>
               </a:rPr>
-              <a:t>340.5h</a:t>
+              <a:t>336.5h</a:t>
             </a:r>
             <a:endParaRPr lang="en-US" sz="2400" dirty="0"/>
           </a:p>
@@ -3936,7 +3936,7 @@
                   <a:srgbClr val="D97706"/>
                 </a:solidFill>
               </a:rPr>
-              <a:t>+182.8h</a:t>
+              <a:t>+181.8h</a:t>
             </a:r>
             <a:endParaRPr lang="en-US" sz="2400" dirty="0"/>
           </a:p>
@@ -3972,7 +3972,7 @@
                   <a:srgbClr val="888888"/>
                 </a:solidFill>
               </a:rPr>
-              <a:t>projetado: 1347.8h (+16%)</a:t>
+              <a:t>projetado: 1346.8h (+16%)</a:t>
             </a:r>
             <a:endParaRPr lang="en-US" sz="700" dirty="0"/>
           </a:p>
@@ -3987,7 +3987,7 @@
         <p:spPr>
           <a:xfrm>
             <a:off x="2441448" y="2916936"/>
-            <a:ext cx="7209781" cy="54864"/>
+            <a:ext cx="7236623" cy="54864"/>
           </a:xfrm>
           <a:prstGeom prst="rect">
             <a:avLst/>
@@ -4011,8 +4011,8 @@
         </p:nvSpPr>
         <p:spPr>
           <a:xfrm>
-            <a:off x="9651229" y="2916936"/>
-            <a:ext cx="2437139" cy="54864"/>
+            <a:off x="9678071" y="2916936"/>
+            <a:ext cx="2410297" cy="54864"/>
           </a:xfrm>
           <a:prstGeom prst="rect">
             <a:avLst/>
@@ -4153,7 +4153,7 @@
                   <a:srgbClr val="0F6E56"/>
                 </a:solidFill>
               </a:rPr>
-              <a:t>84% concluido</a:t>
+              <a:t>85% concluido</a:t>
             </a:r>
             <a:endParaRPr lang="en-US" sz="650" dirty="0"/>
           </a:p>
@@ -4193,7 +4193,7 @@
         <p:spPr>
           <a:xfrm>
             <a:off x="2551176" y="3291840"/>
-            <a:ext cx="3828959" cy="64008"/>
+            <a:ext cx="3874541" cy="64008"/>
           </a:xfrm>
           <a:prstGeom prst="rect">
             <a:avLst/>
@@ -5070,7 +5070,7 @@
                   <a:srgbClr val="D85A30"/>
                 </a:solidFill>
               </a:rPr>
-              <a:t>21.3%</a:t>
+              <a:t>21.1%</a:t>
             </a:r>
             <a:endParaRPr lang="en-US" sz="2200" dirty="0"/>
           </a:p>
@@ -5203,7 +5203,7 @@
                   <a:srgbClr val="534AB7"/>
                 </a:solidFill>
               </a:rPr>
-              <a:t>8.8%</a:t>
+              <a:t>8.7%</a:t>
             </a:r>
             <a:endParaRPr lang="en-US" sz="2200" dirty="0"/>
           </a:p>
@@ -5275,7 +5275,7 @@
                   <a:srgbClr val="888888"/>
                 </a:solidFill>
               </a:rPr>
-              <a:t>14 Sub Bug . 78.3h realizadas</a:t>
+              <a:t>14 Sub Bug . 80.3h realizadas</a:t>
             </a:r>
             <a:endParaRPr lang="en-US" sz="700" dirty="0"/>
           </a:p>
@@ -5336,7 +5336,7 @@
                   <a:srgbClr val="1D9E75"/>
                 </a:solidFill>
               </a:rPr>
-              <a:t>78.8%</a:t>
+              <a:t>78.9%</a:t>
             </a:r>
             <a:endParaRPr lang="en-US" sz="2200" dirty="0"/>
           </a:p>
@@ -5995,7 +5995,7 @@
                   <a:srgbClr val="FFFFFF"/>
                 </a:solidFill>
               </a:rPr>
-              <a:t>140.4h</a:t>
+              <a:t>142.4h</a:t>
             </a:r>
             <a:endParaRPr lang="en-US" sz="650" dirty="0"/>
           </a:p>
@@ -6081,7 +6081,7 @@
                   <a:srgbClr val="222222"/>
                 </a:solidFill>
               </a:rPr>
-              <a:t>Horas nao planejadas: 140.4h</a:t>
+              <a:t>Horas nao planejadas: 142.4h</a:t>
             </a:r>
             <a:endParaRPr lang="en-US" sz="750" dirty="0"/>
           </a:p>
@@ -6762,7 +6762,7 @@
                   <a:srgbClr val="D85A30"/>
                 </a:solidFill>
               </a:rPr>
-              <a:t>266.5h · 43 subs finalizadas</a:t>
+              <a:t>267.5h · 44 subs finalizadas</a:t>
             </a:r>
             <a:endParaRPr lang="en-US" sz="950" dirty="0"/>
           </a:p>
@@ -6798,7 +6798,7 @@
                   <a:srgbClr val="888888"/>
                 </a:solidFill>
               </a:rPr>
-              <a:t>147.5h estimadas</a:t>
+              <a:t>151.5h estimadas</a:t>
             </a:r>
             <a:endParaRPr lang="en-US" sz="850" dirty="0"/>
           </a:p>
@@ -6952,7 +6952,7 @@
                   <a:srgbClr val="D97706"/>
                 </a:solidFill>
               </a:rPr>
-              <a:t>230.5h · 27 subs finalizadas</a:t>
+              <a:t>232.5h · 27 subs finalizadas</a:t>
             </a:r>
             <a:endParaRPr lang="en-US" sz="950" dirty="0"/>
           </a:p>

--- a/Quadro_Aulas_Report_Auto.pptx
+++ b/Quadro_Aulas_Report_Auto.pptx
@@ -1038,7 +1038,7 @@
                   <a:srgbClr val="8FA3C0"/>
                 </a:solidFill>
               </a:rPr>
-              <a:t>1 de Junho de 2026 as 19:13</a:t>
+              <a:t>1 de Junho de 2026 as 19:16</a:t>
             </a:r>
             <a:endParaRPr lang="en-US" sz="700" dirty="0"/>
           </a:p>

--- a/Quadro_Aulas_Report_Auto.pptx
+++ b/Quadro_Aulas_Report_Auto.pptx
@@ -1038,7 +1038,7 @@
                   <a:srgbClr val="8FA3C0"/>
                 </a:solidFill>
               </a:rPr>
-              <a:t>1 de Junho de 2026 as 19:16</a:t>
+              <a:t>2 de Junho de 2026 as 08:08</a:t>
             </a:r>
             <a:endParaRPr lang="en-US" sz="700" dirty="0"/>
           </a:p>
@@ -1207,7 +1207,7 @@
                   <a:srgbClr val="4ADE80"/>
                 </a:solidFill>
               </a:rPr>
-              <a:t>230</a:t>
+              <a:t>231</a:t>
             </a:r>
             <a:endParaRPr lang="en-US" sz="2400" dirty="0"/>
           </a:p>
@@ -1279,7 +1279,7 @@
                   <a:srgbClr val="FCD34D"/>
                 </a:solidFill>
               </a:rPr>
-              <a:t>14</a:t>
+              <a:t>16</a:t>
             </a:r>
             <a:endParaRPr lang="en-US" sz="2400" dirty="0"/>
           </a:p>
@@ -1351,7 +1351,7 @@
                   <a:srgbClr val="F87171"/>
                 </a:solidFill>
               </a:rPr>
-              <a:t>91</a:t>
+              <a:t>88</a:t>
             </a:r>
             <a:endParaRPr lang="en-US" sz="2400" dirty="0"/>
           </a:p>
@@ -1473,7 +1473,7 @@
                   <a:srgbClr val="8FA3C0"/>
                 </a:solidFill>
               </a:rPr>
-              <a:t>67% concluido  .  230 de 345 itens</a:t>
+              <a:t>67% concluido  .  231 de 345 itens</a:t>
             </a:r>
             <a:endParaRPr lang="en-US" sz="700" dirty="0"/>
           </a:p>
@@ -2263,7 +2263,7 @@
                   <a:srgbClr val="222222"/>
                 </a:solidFill>
               </a:rPr>
-              <a:t>A Fazer: 23 . Em progresso: 2 . Finalizados: 71</a:t>
+              <a:t>A Fazer: 20 . Em progresso: 4 . Finalizados: 72</a:t>
             </a:r>
             <a:endParaRPr lang="en-US" sz="750" dirty="0"/>
           </a:p>
@@ -2299,7 +2299,7 @@
                   <a:srgbClr val="222222"/>
                 </a:solidFill>
               </a:rPr>
-              <a:t>Est: 398h . Real: 418.7h . Rem: 54h</a:t>
+              <a:t>Est: 398h . Real: 424.9h . Rem: 46.8h</a:t>
             </a:r>
             <a:endParaRPr lang="en-US" sz="750" dirty="0"/>
           </a:p>
@@ -2425,7 +2425,7 @@
         <p:spPr>
           <a:xfrm>
             <a:off x="4946904" y="1033272"/>
-            <a:ext cx="1630741" cy="50292"/>
+            <a:ext cx="1652778" cy="50292"/>
           </a:xfrm>
           <a:prstGeom prst="rect">
             <a:avLst/>
@@ -2471,7 +2471,7 @@
                   <a:srgbClr val="888888"/>
                 </a:solidFill>
               </a:rPr>
-              <a:t>Subs: 74% · 71 de 96</a:t>
+              <a:t>Subs: 75% · 72 de 96</a:t>
             </a:r>
             <a:endParaRPr lang="en-US" sz="650" dirty="0"/>
           </a:p>
@@ -2507,7 +2507,7 @@
                   <a:srgbClr val="D97706"/>
                 </a:solidFill>
               </a:rPr>
-              <a:t>Projetado: 472.7h (+74.7h / +19%)</a:t>
+              <a:t>Projetado: 471.7h (+73.7h / +19%)</a:t>
             </a:r>
             <a:endParaRPr lang="en-US" sz="800" dirty="0"/>
           </a:p>
@@ -3670,7 +3670,7 @@
                   <a:srgbClr val="D97706"/>
                 </a:solidFill>
               </a:rPr>
-              <a:t>1010.3h</a:t>
+              <a:t>1016.5h</a:t>
             </a:r>
             <a:endParaRPr lang="en-US" sz="2400" dirty="0"/>
           </a:p>
@@ -3803,7 +3803,7 @@
                   <a:srgbClr val="F87171"/>
                 </a:solidFill>
               </a:rPr>
-              <a:t>336.5h</a:t>
+              <a:t>329.3h</a:t>
             </a:r>
             <a:endParaRPr lang="en-US" sz="2400" dirty="0"/>
           </a:p>
@@ -3936,7 +3936,7 @@
                   <a:srgbClr val="D97706"/>
                 </a:solidFill>
               </a:rPr>
-              <a:t>+181.8h</a:t>
+              <a:t>+180.8h</a:t>
             </a:r>
             <a:endParaRPr lang="en-US" sz="2400" dirty="0"/>
           </a:p>
@@ -3972,7 +3972,7 @@
                   <a:srgbClr val="888888"/>
                 </a:solidFill>
               </a:rPr>
-              <a:t>projetado: 1346.8h (+16%)</a:t>
+              <a:t>projetado: 1345.8h (+16%)</a:t>
             </a:r>
             <a:endParaRPr lang="en-US" sz="700" dirty="0"/>
           </a:p>
@@ -3987,7 +3987,7 @@
         <p:spPr>
           <a:xfrm>
             <a:off x="2441448" y="2916936"/>
-            <a:ext cx="7236623" cy="54864"/>
+            <a:ext cx="7286442" cy="54864"/>
           </a:xfrm>
           <a:prstGeom prst="rect">
             <a:avLst/>
@@ -4011,8 +4011,8 @@
         </p:nvSpPr>
         <p:spPr>
           <a:xfrm>
-            <a:off x="9678071" y="2916936"/>
-            <a:ext cx="2410297" cy="54864"/>
+            <a:off x="9727890" y="2916936"/>
+            <a:ext cx="2360478" cy="54864"/>
           </a:xfrm>
           <a:prstGeom prst="rect">
             <a:avLst/>
@@ -4772,7 +4772,7 @@
                   <a:srgbClr val="1D9E75"/>
                 </a:solidFill>
               </a:rPr>
-              <a:t>22/06/2026</a:t>
+              <a:t>23/06/2026</a:t>
             </a:r>
             <a:endParaRPr lang="en-US" sz="1050" dirty="0"/>
           </a:p>
@@ -5070,7 +5070,7 @@
                   <a:srgbClr val="D85A30"/>
                 </a:solidFill>
               </a:rPr>
-              <a:t>21.1%</a:t>
+              <a:t>20.6%</a:t>
             </a:r>
             <a:endParaRPr lang="en-US" sz="2200" dirty="0"/>
           </a:p>
@@ -5203,7 +5203,7 @@
                   <a:srgbClr val="534AB7"/>
                 </a:solidFill>
               </a:rPr>
-              <a:t>8.7%</a:t>
+              <a:t>8.5%</a:t>
             </a:r>
             <a:endParaRPr lang="en-US" sz="2200" dirty="0"/>
           </a:p>
@@ -5336,7 +5336,7 @@
                   <a:srgbClr val="1D9E75"/>
                 </a:solidFill>
               </a:rPr>
-              <a:t>78.9%</a:t>
+              <a:t>79.4%</a:t>
             </a:r>
             <a:endParaRPr lang="en-US" sz="2200" dirty="0"/>
           </a:p>
@@ -5838,7 +5838,7 @@
                   <a:srgbClr val="222222"/>
                 </a:solidFill>
               </a:rPr>
-              <a:t>Observabilidade: Projetado 22/06/2026 · Base 29/05/2026</a:t>
+              <a:t>Observabilidade: Projetado 23/06/2026 · Base 29/05/2026</a:t>
             </a:r>
             <a:endParaRPr lang="en-US" sz="750" dirty="0"/>
           </a:p>
@@ -6762,7 +6762,7 @@
                   <a:srgbClr val="D85A30"/>
                 </a:solidFill>
               </a:rPr>
-              <a:t>267.5h · 44 subs finalizadas</a:t>
+              <a:t>268.5h · 44 subs finalizadas</a:t>
             </a:r>
             <a:endParaRPr lang="en-US" sz="950" dirty="0"/>
           </a:p>
@@ -6952,7 +6952,7 @@
                   <a:srgbClr val="D97706"/>
                 </a:solidFill>
               </a:rPr>
-              <a:t>232.5h · 27 subs finalizadas</a:t>
+              <a:t>237.7h · 28 subs finalizadas</a:t>
             </a:r>
             <a:endParaRPr lang="en-US" sz="950" dirty="0"/>
           </a:p>
@@ -6988,7 +6988,7 @@
                   <a:srgbClr val="888888"/>
                 </a:solidFill>
               </a:rPr>
-              <a:t>188h estimadas</a:t>
+              <a:t>206h estimadas</a:t>
             </a:r>
             <a:endParaRPr lang="en-US" sz="850" dirty="0"/>
           </a:p>

--- a/Quadro_Aulas_Report_Auto.pptx
+++ b/Quadro_Aulas_Report_Auto.pptx
@@ -1038,7 +1038,7 @@
                   <a:srgbClr val="8FA3C0"/>
                 </a:solidFill>
               </a:rPr>
-              <a:t>2 de Junho de 2026 as 08:08</a:t>
+              <a:t>2 de Junho de 2026 as 09:59</a:t>
             </a:r>
             <a:endParaRPr lang="en-US" sz="700" dirty="0"/>
           </a:p>
@@ -2227,7 +2227,7 @@
                   <a:srgbClr val="222222"/>
                 </a:solidFill>
               </a:rPr>
-              <a:t>8 Stories · 3 NFT · 96 itens</a:t>
+              <a:t>8 Stories · 3 NFT · 97 itens</a:t>
             </a:r>
             <a:endParaRPr lang="en-US" sz="750" dirty="0"/>
           </a:p>
@@ -2263,7 +2263,7 @@
                   <a:srgbClr val="222222"/>
                 </a:solidFill>
               </a:rPr>
-              <a:t>A Fazer: 20 . Em progresso: 4 . Finalizados: 72</a:t>
+              <a:t>A Fazer: 21 . Em progresso: 4 . Finalizados: 72</a:t>
             </a:r>
             <a:endParaRPr lang="en-US" sz="750" dirty="0"/>
           </a:p>
@@ -2425,7 +2425,7 @@
         <p:spPr>
           <a:xfrm>
             <a:off x="4946904" y="1033272"/>
-            <a:ext cx="1652778" cy="50292"/>
+            <a:ext cx="1630741" cy="50292"/>
           </a:xfrm>
           <a:prstGeom prst="rect">
             <a:avLst/>
@@ -2471,7 +2471,7 @@
                   <a:srgbClr val="888888"/>
                 </a:solidFill>
               </a:rPr>
-              <a:t>Subs: 75% · 72 de 96</a:t>
+              <a:t>Subs: 74% · 72 de 97</a:t>
             </a:r>
             <a:endParaRPr lang="en-US" sz="650" dirty="0"/>
           </a:p>

--- a/Quadro_Aulas_Report_Auto.pptx
+++ b/Quadro_Aulas_Report_Auto.pptx
@@ -2227,7 +2227,7 @@
                   <a:srgbClr val="222222"/>
                 </a:solidFill>
               </a:rPr>
-              <a:t>8 Stories · 3 NFT · 97 itens</a:t>
+              <a:t>8 Stories · 3 NFT · 98 itens</a:t>
             </a:r>
             <a:endParaRPr lang="en-US" sz="750" dirty="0"/>
           </a:p>
@@ -2263,7 +2263,7 @@
                   <a:srgbClr val="222222"/>
                 </a:solidFill>
               </a:rPr>
-              <a:t>A Fazer: 21 . Em progresso: 4 . Finalizados: 72</a:t>
+              <a:t>A Fazer: 22 . Em progresso: 4 . Finalizados: 72</a:t>
             </a:r>
             <a:endParaRPr lang="en-US" sz="750" dirty="0"/>
           </a:p>
@@ -2425,7 +2425,7 @@
         <p:spPr>
           <a:xfrm>
             <a:off x="4946904" y="1033272"/>
-            <a:ext cx="1630741" cy="50292"/>
+            <a:ext cx="1608704" cy="50292"/>
           </a:xfrm>
           <a:prstGeom prst="rect">
             <a:avLst/>
@@ -2471,7 +2471,7 @@
                   <a:srgbClr val="888888"/>
                 </a:solidFill>
               </a:rPr>
-              <a:t>Subs: 74% · 72 de 97</a:t>
+              <a:t>Subs: 73% · 72 de 98</a:t>
             </a:r>
             <a:endParaRPr lang="en-US" sz="650" dirty="0"/>
           </a:p>
@@ -4153,7 +4153,7 @@
                   <a:srgbClr val="0F6E56"/>
                 </a:solidFill>
               </a:rPr>
-              <a:t>85% concluido</a:t>
+              <a:t>84% concluido</a:t>
             </a:r>
             <a:endParaRPr lang="en-US" sz="650" dirty="0"/>
           </a:p>
@@ -4193,7 +4193,7 @@
         <p:spPr>
           <a:xfrm>
             <a:off x="2551176" y="3291840"/>
-            <a:ext cx="3874541" cy="64008"/>
+            <a:ext cx="3828959" cy="64008"/>
           </a:xfrm>
           <a:prstGeom prst="rect">
             <a:avLst/>

--- a/Quadro_Aulas_Report_Auto.pptx
+++ b/Quadro_Aulas_Report_Auto.pptx
@@ -1038,7 +1038,7 @@
                   <a:srgbClr val="8FA3C0"/>
                 </a:solidFill>
               </a:rPr>
-              <a:t>2 de Junho de 2026 as 09:59</a:t>
+              <a:t>2 de Junho de 2026 as 10:27</a:t>
             </a:r>
             <a:endParaRPr lang="en-US" sz="700" dirty="0"/>
           </a:p>
@@ -1135,7 +1135,7 @@
                   <a:srgbClr val="FFFFFF"/>
                 </a:solidFill>
               </a:rPr>
-              <a:t>345</a:t>
+              <a:t>346</a:t>
             </a:r>
             <a:endParaRPr lang="en-US" sz="2400" dirty="0"/>
           </a:p>
@@ -1279,7 +1279,7 @@
                   <a:srgbClr val="FCD34D"/>
                 </a:solidFill>
               </a:rPr>
-              <a:t>16</a:t>
+              <a:t>17</a:t>
             </a:r>
             <a:endParaRPr lang="en-US" sz="2400" dirty="0"/>
           </a:p>
@@ -1473,7 +1473,7 @@
                   <a:srgbClr val="8FA3C0"/>
                 </a:solidFill>
               </a:rPr>
-              <a:t>67% concluido  .  231 de 345 itens</a:t>
+              <a:t>67% concluido  .  231 de 346 itens</a:t>
             </a:r>
             <a:endParaRPr lang="en-US" sz="700" dirty="0"/>
           </a:p>
@@ -2263,7 +2263,7 @@
                   <a:srgbClr val="222222"/>
                 </a:solidFill>
               </a:rPr>
-              <a:t>A Fazer: 22 . Em progresso: 4 . Finalizados: 72</a:t>
+              <a:t>A Fazer: 21 . Em progresso: 5 . Finalizados: 72</a:t>
             </a:r>
             <a:endParaRPr lang="en-US" sz="750" dirty="0"/>
           </a:p>
@@ -3537,7 +3537,7 @@
                   <a:srgbClr val="222222"/>
                 </a:solidFill>
               </a:rPr>
-              <a:t>1165h</a:t>
+              <a:t>1167h</a:t>
             </a:r>
             <a:endParaRPr lang="en-US" sz="2400" dirty="0"/>
           </a:p>
@@ -3803,7 +3803,7 @@
                   <a:srgbClr val="F87171"/>
                 </a:solidFill>
               </a:rPr>
-              <a:t>329.3h</a:t>
+              <a:t>331.3h</a:t>
             </a:r>
             <a:endParaRPr lang="en-US" sz="2400" dirty="0"/>
           </a:p>
@@ -3972,7 +3972,7 @@
                   <a:srgbClr val="888888"/>
                 </a:solidFill>
               </a:rPr>
-              <a:t>projetado: 1345.8h (+16%)</a:t>
+              <a:t>projetado: 1347.8h (+15%)</a:t>
             </a:r>
             <a:endParaRPr lang="en-US" sz="700" dirty="0"/>
           </a:p>
@@ -3987,7 +3987,7 @@
         <p:spPr>
           <a:xfrm>
             <a:off x="2441448" y="2916936"/>
-            <a:ext cx="7286442" cy="54864"/>
+            <a:ext cx="7275630" cy="54864"/>
           </a:xfrm>
           <a:prstGeom prst="rect">
             <a:avLst/>
@@ -4011,8 +4011,8 @@
         </p:nvSpPr>
         <p:spPr>
           <a:xfrm>
-            <a:off x="9727890" y="2916936"/>
-            <a:ext cx="2360478" cy="54864"/>
+            <a:off x="9717078" y="2916936"/>
+            <a:ext cx="2371290" cy="54864"/>
           </a:xfrm>
           <a:prstGeom prst="rect">
             <a:avLst/>
@@ -6210,7 +6210,7 @@
                   <a:srgbClr val="FFFFFF"/>
                 </a:solidFill>
               </a:rPr>
-              <a:t>82</a:t>
+              <a:t>83</a:t>
             </a:r>
             <a:endParaRPr lang="en-US" sz="650" dirty="0"/>
           </a:p>
@@ -6260,7 +6260,7 @@
                   <a:srgbClr val="222222"/>
                 </a:solidFill>
               </a:rPr>
-              <a:t>82 itens criados pos 01/05</a:t>
+              <a:t>83 itens criados pos 01/05</a:t>
             </a:r>
             <a:endParaRPr lang="en-US" sz="750" dirty="0"/>
           </a:p>
@@ -6526,7 +6526,7 @@
         <p:spPr>
           <a:xfrm>
             <a:off x="2496312" y="6153912"/>
-            <a:ext cx="1088759" cy="73152"/>
+            <a:ext cx="1085426" cy="73152"/>
           </a:xfrm>
           <a:prstGeom prst="rect">
             <a:avLst/>
@@ -6572,7 +6572,7 @@
                   <a:srgbClr val="1D9E75"/>
                 </a:solidFill>
               </a:rPr>
-              <a:t>142.7h · 26 subs finalizadas</a:t>
+              <a:t>147.7h · 26 subs finalizadas</a:t>
             </a:r>
             <a:endParaRPr lang="en-US" sz="950" dirty="0"/>
           </a:p>
@@ -6608,7 +6608,7 @@
                   <a:srgbClr val="888888"/>
                 </a:solidFill>
               </a:rPr>
-              <a:t>157h estimadas</a:t>
+              <a:t>163h estimadas</a:t>
             </a:r>
             <a:endParaRPr lang="en-US" sz="850" dirty="0"/>
           </a:p>
@@ -7292,11 +7292,11 @@
             <a:avLst/>
           </a:prstGeom>
           <a:solidFill>
-            <a:srgbClr val="D97706"/>
-          </a:solidFill>
-          <a:ln w="12700">
-            <a:solidFill>
-              <a:srgbClr val="D97706"/>
+            <a:srgbClr val="1D9E75"/>
+          </a:solidFill>
+          <a:ln w="12700">
+            <a:solidFill>
+              <a:srgbClr val="1D9E75"/>
             </a:solidFill>
             <a:prstDash val="solid"/>
           </a:ln>
@@ -7329,7 +7329,7 @@
             <a:r>
               <a:rPr lang="en-US" sz="950" b="1" dirty="0">
                 <a:solidFill>
-                  <a:srgbClr val="D97706"/>
+                  <a:srgbClr val="1D9E75"/>
                 </a:solidFill>
               </a:rPr>
               <a:t>164h · 20 subs finalizadas</a:t>
@@ -7368,7 +7368,7 @@
                   <a:srgbClr val="888888"/>
                 </a:solidFill>
               </a:rPr>
-              <a:t>162h estimadas</a:t>
+              <a:t>164h estimadas</a:t>
             </a:r>
             <a:endParaRPr lang="en-US" sz="850" dirty="0"/>
           </a:p>

--- a/Quadro_Aulas_Report_Auto.pptx
+++ b/Quadro_Aulas_Report_Auto.pptx
@@ -1038,7 +1038,7 @@
                   <a:srgbClr val="8FA3C0"/>
                 </a:solidFill>
               </a:rPr>
-              <a:t>2 de Junho de 2026 as 10:27</a:t>
+              <a:t>2 de Junho de 2026 as 10:49</a:t>
             </a:r>
             <a:endParaRPr lang="en-US" sz="700" dirty="0"/>
           </a:p>

--- a/Quadro_Aulas_Report_Auto.pptx
+++ b/Quadro_Aulas_Report_Auto.pptx
@@ -1038,7 +1038,7 @@
                   <a:srgbClr val="8FA3C0"/>
                 </a:solidFill>
               </a:rPr>
-              <a:t>2 de Junho de 2026 as 10:49</a:t>
+              <a:t>2 de Junho de 2026 as 18:14</a:t>
             </a:r>
             <a:endParaRPr lang="en-US" sz="700" dirty="0"/>
           </a:p>
@@ -1135,7 +1135,7 @@
                   <a:srgbClr val="FFFFFF"/>
                 </a:solidFill>
               </a:rPr>
-              <a:t>346</a:t>
+              <a:t>347</a:t>
             </a:r>
             <a:endParaRPr lang="en-US" sz="2400" dirty="0"/>
           </a:p>
@@ -1207,7 +1207,7 @@
                   <a:srgbClr val="4ADE80"/>
                 </a:solidFill>
               </a:rPr>
-              <a:t>231</a:t>
+              <a:t>240</a:t>
             </a:r>
             <a:endParaRPr lang="en-US" sz="2400" dirty="0"/>
           </a:p>
@@ -1279,7 +1279,7 @@
                   <a:srgbClr val="FCD34D"/>
                 </a:solidFill>
               </a:rPr>
-              <a:t>17</a:t>
+              <a:t>15</a:t>
             </a:r>
             <a:endParaRPr lang="en-US" sz="2400" dirty="0"/>
           </a:p>
@@ -1351,7 +1351,7 @@
                   <a:srgbClr val="F87171"/>
                 </a:solidFill>
               </a:rPr>
-              <a:t>88</a:t>
+              <a:t>82</a:t>
             </a:r>
             <a:endParaRPr lang="en-US" sz="2400" dirty="0"/>
           </a:p>
@@ -1427,7 +1427,7 @@
         <p:spPr>
           <a:xfrm>
             <a:off x="137160" y="3538728"/>
-            <a:ext cx="1378458" cy="91440"/>
+            <a:ext cx="1419606" cy="91440"/>
           </a:xfrm>
           <a:prstGeom prst="rect">
             <a:avLst/>
@@ -1473,7 +1473,7 @@
                   <a:srgbClr val="8FA3C0"/>
                 </a:solidFill>
               </a:rPr>
-              <a:t>67% concluido  .  231 de 346 itens</a:t>
+              <a:t>69% concluido  .  240 de 347 itens</a:t>
             </a:r>
             <a:endParaRPr lang="en-US" sz="700" dirty="0"/>
           </a:p>
@@ -2263,7 +2263,7 @@
                   <a:srgbClr val="222222"/>
                 </a:solidFill>
               </a:rPr>
-              <a:t>A Fazer: 21 . Em progresso: 5 . Finalizados: 72</a:t>
+              <a:t>A Fazer: 16 . Em progresso: 4 . Finalizados: 78</a:t>
             </a:r>
             <a:endParaRPr lang="en-US" sz="750" dirty="0"/>
           </a:p>
@@ -2299,7 +2299,7 @@
                   <a:srgbClr val="222222"/>
                 </a:solidFill>
               </a:rPr>
-              <a:t>Est: 398h . Real: 424.9h . Rem: 46.8h</a:t>
+              <a:t>Est: 397h . Real: 431.9h . Rem: 42.3h</a:t>
             </a:r>
             <a:endParaRPr lang="en-US" sz="750" dirty="0"/>
           </a:p>
@@ -2339,7 +2339,7 @@
         <p:spPr>
           <a:xfrm>
             <a:off x="4946904" y="859536"/>
-            <a:ext cx="991667" cy="50292"/>
+            <a:ext cx="1212037" cy="50292"/>
           </a:xfrm>
           <a:prstGeom prst="rect">
             <a:avLst/>
@@ -2385,7 +2385,7 @@
                   <a:srgbClr val="888888"/>
                 </a:solidFill>
               </a:rPr>
-              <a:t>Stories/NFTs: 45% · 5 de 11</a:t>
+              <a:t>Stories/NFTs: 55% · 6 de 11</a:t>
             </a:r>
             <a:endParaRPr lang="en-US" sz="650" dirty="0"/>
           </a:p>
@@ -2425,7 +2425,7 @@
         <p:spPr>
           <a:xfrm>
             <a:off x="4946904" y="1033272"/>
-            <a:ext cx="1608704" cy="50292"/>
+            <a:ext cx="1762963" cy="50292"/>
           </a:xfrm>
           <a:prstGeom prst="rect">
             <a:avLst/>
@@ -2471,7 +2471,7 @@
                   <a:srgbClr val="888888"/>
                 </a:solidFill>
               </a:rPr>
-              <a:t>Subs: 73% · 72 de 98</a:t>
+              <a:t>Subs: 80% · 78 de 98</a:t>
             </a:r>
             <a:endParaRPr lang="en-US" sz="650" dirty="0"/>
           </a:p>
@@ -2507,7 +2507,7 @@
                   <a:srgbClr val="D97706"/>
                 </a:solidFill>
               </a:rPr>
-              <a:t>Projetado: 471.7h (+73.7h / +19%)</a:t>
+              <a:t>Projetado: 474.2h (+77.2h / +19%)</a:t>
             </a:r>
             <a:endParaRPr lang="en-US" sz="800" dirty="0"/>
           </a:p>
@@ -3537,7 +3537,7 @@
                   <a:srgbClr val="222222"/>
                 </a:solidFill>
               </a:rPr>
-              <a:t>1167h</a:t>
+              <a:t>1166h</a:t>
             </a:r>
             <a:endParaRPr lang="en-US" sz="2400" dirty="0"/>
           </a:p>
@@ -3670,7 +3670,7 @@
                   <a:srgbClr val="D97706"/>
                 </a:solidFill>
               </a:rPr>
-              <a:t>1016.5h</a:t>
+              <a:t>1025h</a:t>
             </a:r>
             <a:endParaRPr lang="en-US" sz="2400" dirty="0"/>
           </a:p>
@@ -3803,7 +3803,7 @@
                   <a:srgbClr val="F87171"/>
                 </a:solidFill>
               </a:rPr>
-              <a:t>331.3h</a:t>
+              <a:t>324.8h</a:t>
             </a:r>
             <a:endParaRPr lang="en-US" sz="2400" dirty="0"/>
           </a:p>
@@ -3936,7 +3936,7 @@
                   <a:srgbClr val="D97706"/>
                 </a:solidFill>
               </a:rPr>
-              <a:t>+180.8h</a:t>
+              <a:t>+183.8h</a:t>
             </a:r>
             <a:endParaRPr lang="en-US" sz="2400" dirty="0"/>
           </a:p>
@@ -3972,7 +3972,7 @@
                   <a:srgbClr val="888888"/>
                 </a:solidFill>
               </a:rPr>
-              <a:t>projetado: 1347.8h (+15%)</a:t>
+              <a:t>projetado: 1349.8h (+16%)</a:t>
             </a:r>
             <a:endParaRPr lang="en-US" sz="700" dirty="0"/>
           </a:p>
@@ -3987,7 +3987,7 @@
         <p:spPr>
           <a:xfrm>
             <a:off x="2441448" y="2916936"/>
-            <a:ext cx="7275630" cy="54864"/>
+            <a:ext cx="7325599" cy="54864"/>
           </a:xfrm>
           <a:prstGeom prst="rect">
             <a:avLst/>
@@ -4011,8 +4011,8 @@
         </p:nvSpPr>
         <p:spPr>
           <a:xfrm>
-            <a:off x="9717078" y="2916936"/>
-            <a:ext cx="2371290" cy="54864"/>
+            <a:off x="9767047" y="2916936"/>
+            <a:ext cx="2321321" cy="54864"/>
           </a:xfrm>
           <a:prstGeom prst="rect">
             <a:avLst/>
@@ -4153,7 +4153,7 @@
                   <a:srgbClr val="0F6E56"/>
                 </a:solidFill>
               </a:rPr>
-              <a:t>84% concluido</a:t>
+              <a:t>88% concluido</a:t>
             </a:r>
             <a:endParaRPr lang="en-US" sz="650" dirty="0"/>
           </a:p>
@@ -4193,7 +4193,7 @@
         <p:spPr>
           <a:xfrm>
             <a:off x="2551176" y="3291840"/>
-            <a:ext cx="3828959" cy="64008"/>
+            <a:ext cx="4011290" cy="64008"/>
           </a:xfrm>
           <a:prstGeom prst="rect">
             <a:avLst/>
@@ -5070,7 +5070,7 @@
                   <a:srgbClr val="D85A30"/>
                 </a:solidFill>
               </a:rPr>
-              <a:t>20.6%</a:t>
+              <a:t>20.1%</a:t>
             </a:r>
             <a:endParaRPr lang="en-US" sz="2200" dirty="0"/>
           </a:p>
@@ -5203,7 +5203,7 @@
                   <a:srgbClr val="534AB7"/>
                 </a:solidFill>
               </a:rPr>
-              <a:t>8.5%</a:t>
+              <a:t>8.9%</a:t>
             </a:r>
             <a:endParaRPr lang="en-US" sz="2200" dirty="0"/>
           </a:p>
@@ -5275,7 +5275,7 @@
                   <a:srgbClr val="888888"/>
                 </a:solidFill>
               </a:rPr>
-              <a:t>14 Sub Bug . 80.3h realizadas</a:t>
+              <a:t>15 Sub Bug . 81.3h realizadas</a:t>
             </a:r>
             <a:endParaRPr lang="en-US" sz="700" dirty="0"/>
           </a:p>
@@ -5336,7 +5336,7 @@
                   <a:srgbClr val="1D9E75"/>
                 </a:solidFill>
               </a:rPr>
-              <a:t>79.4%</a:t>
+              <a:t>79.9%</a:t>
             </a:r>
             <a:endParaRPr lang="en-US" sz="2200" dirty="0"/>
           </a:p>
@@ -5788,7 +5788,7 @@
                   <a:srgbClr val="FFFFFF"/>
                 </a:solidFill>
               </a:rPr>
-              <a:t>~25 dias</a:t>
+              <a:t>~16 dias</a:t>
             </a:r>
             <a:endParaRPr lang="en-US" sz="650" dirty="0"/>
           </a:p>
@@ -6210,7 +6210,7 @@
                   <a:srgbClr val="FFFFFF"/>
                 </a:solidFill>
               </a:rPr>
-              <a:t>83</a:t>
+              <a:t>84</a:t>
             </a:r>
             <a:endParaRPr lang="en-US" sz="650" dirty="0"/>
           </a:p>
@@ -6260,7 +6260,7 @@
                   <a:srgbClr val="222222"/>
                 </a:solidFill>
               </a:rPr>
-              <a:t>83 itens criados pos 01/05</a:t>
+              <a:t>84 itens criados pos 01/05</a:t>
             </a:r>
             <a:endParaRPr lang="en-US" sz="750" dirty="0"/>
           </a:p>
@@ -6526,7 +6526,7 @@
         <p:spPr>
           <a:xfrm>
             <a:off x="2496312" y="6153912"/>
-            <a:ext cx="1085426" cy="73152"/>
+            <a:ext cx="1119220" cy="73152"/>
           </a:xfrm>
           <a:prstGeom prst="rect">
             <a:avLst/>
@@ -6572,7 +6572,7 @@
                   <a:srgbClr val="1D9E75"/>
                 </a:solidFill>
               </a:rPr>
-              <a:t>147.7h · 26 subs finalizadas</a:t>
+              <a:t>153.7h · 31 subs finalizadas</a:t>
             </a:r>
             <a:endParaRPr lang="en-US" sz="950" dirty="0"/>
           </a:p>
@@ -6608,7 +6608,7 @@
                   <a:srgbClr val="888888"/>
                 </a:solidFill>
               </a:rPr>
-              <a:t>163h estimadas</a:t>
+              <a:t>164.5h estimadas</a:t>
             </a:r>
             <a:endParaRPr lang="en-US" sz="850" dirty="0"/>
           </a:p>
@@ -6762,7 +6762,7 @@
                   <a:srgbClr val="D85A30"/>
                 </a:solidFill>
               </a:rPr>
-              <a:t>268.5h · 44 subs finalizadas</a:t>
+              <a:t>269.5h · 45 subs finalizadas</a:t>
             </a:r>
             <a:endParaRPr lang="en-US" sz="950" dirty="0"/>
           </a:p>
@@ -7292,11 +7292,11 @@
             <a:avLst/>
           </a:prstGeom>
           <a:solidFill>
-            <a:srgbClr val="1D9E75"/>
-          </a:solidFill>
-          <a:ln w="12700">
-            <a:solidFill>
-              <a:srgbClr val="1D9E75"/>
+            <a:srgbClr val="D97706"/>
+          </a:solidFill>
+          <a:ln w="12700">
+            <a:solidFill>
+              <a:srgbClr val="D97706"/>
             </a:solidFill>
             <a:prstDash val="solid"/>
           </a:ln>
@@ -7329,10 +7329,10 @@
             <a:r>
               <a:rPr lang="en-US" sz="950" b="1" dirty="0">
                 <a:solidFill>
-                  <a:srgbClr val="1D9E75"/>
-                </a:solidFill>
-              </a:rPr>
-              <a:t>164h · 20 subs finalizadas</a:t>
+                  <a:srgbClr val="D97706"/>
+                </a:solidFill>
+              </a:rPr>
+              <a:t>164.5h · 21 subs finalizadas</a:t>
             </a:r>
             <a:endParaRPr lang="en-US" sz="950" dirty="0"/>
           </a:p>

--- a/Quadro_Aulas_Report_Auto.pptx
+++ b/Quadro_Aulas_Report_Auto.pptx
@@ -1038,7 +1038,7 @@
                   <a:srgbClr val="8FA3C0"/>
                 </a:solidFill>
               </a:rPr>
-              <a:t>2 de Junho de 2026 as 18:14</a:t>
+              <a:t>3 de Junho de 2026 as 08:32</a:t>
             </a:r>
             <a:endParaRPr lang="en-US" sz="700" dirty="0"/>
           </a:p>
@@ -4300,7 +4300,7 @@
                   <a:srgbClr val="1D9E75"/>
                 </a:solidFill>
               </a:rPr>
-              <a:t>04/06/2026</a:t>
+              <a:t>05/06/2026</a:t>
             </a:r>
             <a:endParaRPr lang="en-US" sz="1050" dirty="0"/>
           </a:p>
@@ -4772,7 +4772,7 @@
                   <a:srgbClr val="1D9E75"/>
                 </a:solidFill>
               </a:rPr>
-              <a:t>23/06/2026</a:t>
+              <a:t>24/06/2026</a:t>
             </a:r>
             <a:endParaRPr lang="en-US" sz="1050" dirty="0"/>
           </a:p>
@@ -5838,7 +5838,7 @@
                   <a:srgbClr val="222222"/>
                 </a:solidFill>
               </a:rPr>
-              <a:t>Observabilidade: Projetado 23/06/2026 · Base 29/05/2026</a:t>
+              <a:t>Observabilidade: Projetado 24/06/2026 · Base 29/05/2026</a:t>
             </a:r>
             <a:endParaRPr lang="en-US" sz="750" dirty="0"/>
           </a:p>

--- a/Quadro_Aulas_Report_Auto.pptx
+++ b/Quadro_Aulas_Report_Auto.pptx
@@ -1038,7 +1038,7 @@
                   <a:srgbClr val="8FA3C0"/>
                 </a:solidFill>
               </a:rPr>
-              <a:t>3 de Junho de 2026 as 08:32</a:t>
+              <a:t>3 de Junho de 2026 as 08:49</a:t>
             </a:r>
             <a:endParaRPr lang="en-US" sz="700" dirty="0"/>
           </a:p>
